--- a/client/ПРЕЗЕНТАЦИЯ_ОНЛАЙН_ЭТАПА.pptx
+++ b/client/ПРЕЗЕНТАЦИЯ_ОНЛАЙН_ЭТАПА.pptx
@@ -10490,204 +10490,41 @@
           <a:ln/>
         </p:spPr>
       </p:sp>
-      <p:sp>
-        <p:nvSpPr>
-          <p:cNvPr id="6" name="Text 4"/>
-          <p:cNvSpPr/>
-          <p:nvPr/>
-        </p:nvSpPr>
+      <p:pic>
+        <p:nvPicPr>
+          <p:cNvPr id="28" name="Снимок 1" descr="Снимок шага 1: адрес вывоза с подсказкой"/>
+          <p:cNvPicPr>
+            <a:picLocks noChangeAspect="1"/>
+          </p:cNvPicPr>
+          <p:nvPr/>
+        </p:nvPicPr>
+        <p:blipFill>
+          <a:blip r:embed="rId3"/>
+          <a:stretch>
+            <a:fillRect/>
+          </a:stretch>
+        </p:blipFill>
         <p:spPr>
           <a:xfrm>
             <a:off x="1173480" y="2440186"/>
             <a:ext cx="2834640" cy="3733800"/>
-          </a:xfrm>
-          <a:prstGeom prst="rect">
-            <a:avLst/>
-          </a:prstGeom>
-          <a:noFill/>
-          <a:ln/>
-        </p:spPr>
-        <p:txBody>
-          <a:bodyPr wrap="square" lIns="25400" tIns="25400" rIns="25400" bIns="25400" rtlCol="0" anchor="ctr">
-            <a:normAutofit/>
-          </a:bodyPr>
-          <a:lstStyle/>
-          <a:p>
-            <a:pPr algn="ctr" indent="0" marL="0">
-              <a:buNone/>
-            </a:pPr>
-            <a:r>
-              <a:rPr lang="en-US" sz="1800" dirty="0">
-                <a:solidFill>
-                  <a:srgbClr val="6B6B70"/>
-                </a:solidFill>
-                <a:latin typeface="Courier New" pitchFamily="34" charset="0"/>
-                <a:ea typeface="Courier New" pitchFamily="34" charset="-122"/>
-                <a:cs typeface="Courier New" pitchFamily="34" charset="-120"/>
-              </a:rPr>
-              <a:t>снимок: адрес</a:t>
-            </a:r>
-            <a:endParaRPr lang="en-US" sz="1800" dirty="0"/>
-          </a:p>
-        </p:txBody>
-      </p:sp>
-      <p:sp>
-        <p:nvSpPr>
-          <p:cNvPr id="7" name="Text 5"/>
-          <p:cNvSpPr/>
-          <p:nvPr/>
-        </p:nvSpPr>
-        <p:spPr>
-          <a:xfrm>
-            <a:off x="1066800" y="6440686"/>
-            <a:ext cx="3352800" cy="333375"/>
-          </a:xfrm>
-          <a:prstGeom prst="rect">
-            <a:avLst/>
-          </a:prstGeom>
-          <a:noFill/>
-          <a:ln/>
-        </p:spPr>
-        <p:txBody>
-          <a:bodyPr wrap="square" lIns="25400" tIns="25400" rIns="25400" bIns="25400" rtlCol="0" anchor="t">
-            <a:normAutofit/>
-          </a:bodyPr>
-          <a:lstStyle/>
-          <a:p>
-            <a:pPr algn="l" indent="0" marL="0">
-              <a:buNone/>
-            </a:pPr>
-            <a:r>
-              <a:rPr lang="en-US" sz="1950" b="1" dirty="0">
-                <a:solidFill>
-                  <a:srgbClr val="111111"/>
-                </a:solidFill>
-                <a:latin typeface="Arial" pitchFamily="34" charset="0"/>
-                <a:ea typeface="Arial" pitchFamily="34" charset="-122"/>
-                <a:cs typeface="Arial" pitchFamily="34" charset="-120"/>
-              </a:rPr>
-              <a:t>1. Адрес</a:t>
-            </a:r>
-            <a:endParaRPr lang="en-US" sz="1950" dirty="0"/>
-          </a:p>
-        </p:txBody>
-      </p:sp>
-      <p:sp>
-        <p:nvSpPr>
-          <p:cNvPr id="8" name="Text 6"/>
-          <p:cNvSpPr/>
-          <p:nvPr/>
-        </p:nvSpPr>
-        <p:spPr>
-          <a:xfrm>
-            <a:off x="1066800" y="6888361"/>
-            <a:ext cx="3139440" cy="929283"/>
-          </a:xfrm>
-          <a:prstGeom prst="rect">
-            <a:avLst/>
-          </a:prstGeom>
-          <a:noFill/>
-          <a:ln/>
-        </p:spPr>
-        <p:txBody>
-          <a:bodyPr wrap="square" lIns="25400" tIns="25400" rIns="25400" bIns="25400" rtlCol="0" anchor="t">
-            <a:normAutofit/>
-          </a:bodyPr>
-          <a:lstStyle/>
-          <a:p>
-            <a:pPr algn="l" indent="0" marL="0">
-              <a:lnSpc>
-                <a:spcPct val="111429"/>
-              </a:lnSpc>
-              <a:buNone/>
-            </a:pPr>
-            <a:r>
-              <a:rPr lang="en-US" sz="1800" dirty="0">
-                <a:solidFill>
-                  <a:srgbClr val="3A3A3E"/>
-                </a:solidFill>
-                <a:latin typeface="Arial" pitchFamily="34" charset="0"/>
-                <a:ea typeface="Arial" pitchFamily="34" charset="-122"/>
-                <a:cs typeface="Arial" pitchFamily="34" charset="-120"/>
-              </a:rPr>
-              <a:t>Выбирается из подсказки, расчёт идёт по координатам</a:t>
-            </a:r>
-            <a:endParaRPr lang="en-US" sz="1800" dirty="0"/>
-          </a:p>
-        </p:txBody>
-      </p:sp>
-      <p:sp>
-        <p:nvSpPr>
-          <p:cNvPr id="9" name="Shape 7"/>
-          <p:cNvSpPr/>
-          <p:nvPr/>
-        </p:nvSpPr>
-        <p:spPr>
-          <a:xfrm>
-            <a:off x="4343400" y="2287786"/>
-            <a:ext cx="3048000" cy="4000500"/>
           </a:xfrm>
           <a:prstGeom prst="roundRect">
             <a:avLst>
               <a:gd name="adj" fmla="val 6250"/>
             </a:avLst>
           </a:prstGeom>
-          <a:solidFill>
-            <a:srgbClr val="EDECF0"/>
-          </a:solidFill>
-          <a:ln/>
-        </p:spPr>
-      </p:sp>
-      <p:sp>
-        <p:nvSpPr>
-          <p:cNvPr id="10" name="Text 8"/>
-          <p:cNvSpPr/>
-          <p:nvPr/>
-        </p:nvSpPr>
-        <p:spPr>
-          <a:xfrm>
-            <a:off x="4450080" y="2440186"/>
-            <a:ext cx="2834640" cy="3733800"/>
-          </a:xfrm>
-          <a:prstGeom prst="rect">
-            <a:avLst/>
-          </a:prstGeom>
-          <a:noFill/>
-          <a:ln/>
-        </p:spPr>
-        <p:txBody>
-          <a:bodyPr wrap="square" lIns="25400" tIns="25400" rIns="25400" bIns="25400" rtlCol="0" anchor="ctr">
-            <a:normAutofit/>
-          </a:bodyPr>
-          <a:lstStyle/>
-          <a:p>
-            <a:pPr algn="ctr" indent="0" marL="0">
-              <a:buNone/>
-            </a:pPr>
-            <a:r>
-              <a:rPr lang="en-US" sz="1800" dirty="0">
-                <a:solidFill>
-                  <a:srgbClr val="6B6B70"/>
-                </a:solidFill>
-                <a:latin typeface="Courier New" pitchFamily="34" charset="0"/>
-                <a:ea typeface="Courier New" pitchFamily="34" charset="-122"/>
-                <a:cs typeface="Courier New" pitchFamily="34" charset="-120"/>
-              </a:rPr>
-              <a:t>снимок: отходы и объём</a:t>
-            </a:r>
-            <a:endParaRPr lang="en-US" sz="1800" dirty="0"/>
-          </a:p>
-        </p:txBody>
-      </p:sp>
-      <p:sp>
-        <p:nvSpPr>
-          <p:cNvPr id="11" name="Text 9"/>
-          <p:cNvSpPr/>
-          <p:nvPr/>
-        </p:nvSpPr>
-        <p:spPr>
-          <a:xfrm>
-            <a:off x="4343400" y="6440686"/>
+        </p:spPr>
+      </p:pic>
+      <p:sp>
+        <p:nvSpPr>
+          <p:cNvPr id="7" name="Text 5"/>
+          <p:cNvSpPr/>
+          <p:nvPr/>
+        </p:nvSpPr>
+        <p:spPr>
+          <a:xfrm>
+            <a:off x="1066800" y="6440686"/>
             <a:ext cx="3352800" cy="333375"/>
           </a:xfrm>
           <a:prstGeom prst="rect">
@@ -10714,7 +10551,7 @@
                 <a:ea typeface="Arial" pitchFamily="34" charset="-122"/>
                 <a:cs typeface="Arial" pitchFamily="34" charset="-120"/>
               </a:rPr>
-              <a:t>2. Отходы и объём</a:t>
+              <a:t>1. Адрес</a:t>
             </a:r>
             <a:endParaRPr lang="en-US" sz="1950" dirty="0"/>
           </a:p>
@@ -10722,13 +10559,13 @@
       </p:sp>
       <p:sp>
         <p:nvSpPr>
-          <p:cNvPr id="12" name="Text 10"/>
-          <p:cNvSpPr/>
-          <p:nvPr/>
-        </p:nvSpPr>
-        <p:spPr>
-          <a:xfrm>
-            <a:off x="4343400" y="6888361"/>
+          <p:cNvPr id="8" name="Text 6"/>
+          <p:cNvSpPr/>
+          <p:nvPr/>
+        </p:nvSpPr>
+        <p:spPr>
+          <a:xfrm>
+            <a:off x="1066800" y="6888361"/>
             <a:ext cx="3139440" cy="929283"/>
           </a:xfrm>
           <a:prstGeom prst="rect">
@@ -10758,7 +10595,7 @@
                 <a:ea typeface="Arial" pitchFamily="34" charset="-122"/>
                 <a:cs typeface="Arial" pitchFamily="34" charset="-120"/>
               </a:rPr>
-              <a:t>В тоннах или кубометрах, в тонны переводит сервер</a:t>
+              <a:t>Выбирается из подсказки, расчёт идёт по координатам</a:t>
             </a:r>
             <a:endParaRPr lang="en-US" sz="1800" dirty="0"/>
           </a:p>
@@ -10766,13 +10603,13 @@
       </p:sp>
       <p:sp>
         <p:nvSpPr>
-          <p:cNvPr id="13" name="Shape 11"/>
-          <p:cNvSpPr/>
-          <p:nvPr/>
-        </p:nvSpPr>
-        <p:spPr>
-          <a:xfrm>
-            <a:off x="7620000" y="2287786"/>
+          <p:cNvPr id="9" name="Shape 7"/>
+          <p:cNvSpPr/>
+          <p:nvPr/>
+        </p:nvSpPr>
+        <p:spPr>
+          <a:xfrm>
+            <a:off x="4343400" y="2287786"/>
             <a:ext cx="3048000" cy="4000500"/>
           </a:xfrm>
           <a:prstGeom prst="roundRect">
@@ -10786,204 +10623,41 @@
           <a:ln/>
         </p:spPr>
       </p:sp>
-      <p:sp>
-        <p:nvSpPr>
-          <p:cNvPr id="14" name="Text 12"/>
-          <p:cNvSpPr/>
-          <p:nvPr/>
-        </p:nvSpPr>
-        <p:spPr>
-          <a:xfrm>
-            <a:off x="7726680" y="2440186"/>
+      <p:pic>
+        <p:nvPicPr>
+          <p:cNvPr id="29" name="Снимок 2" descr="Снимок шага 2: тип отходов и объём"/>
+          <p:cNvPicPr>
+            <a:picLocks noChangeAspect="1"/>
+          </p:cNvPicPr>
+          <p:nvPr/>
+        </p:nvPicPr>
+        <p:blipFill>
+          <a:blip r:embed="rId4"/>
+          <a:stretch>
+            <a:fillRect/>
+          </a:stretch>
+        </p:blipFill>
+        <p:spPr>
+          <a:xfrm>
+            <a:off x="4450080" y="2440186"/>
             <a:ext cx="2834640" cy="3733800"/>
-          </a:xfrm>
-          <a:prstGeom prst="rect">
-            <a:avLst/>
-          </a:prstGeom>
-          <a:noFill/>
-          <a:ln/>
-        </p:spPr>
-        <p:txBody>
-          <a:bodyPr wrap="square" lIns="25400" tIns="25400" rIns="25400" bIns="25400" rtlCol="0" anchor="ctr">
-            <a:normAutofit/>
-          </a:bodyPr>
-          <a:lstStyle/>
-          <a:p>
-            <a:pPr algn="ctr" indent="0" marL="0">
-              <a:buNone/>
-            </a:pPr>
-            <a:r>
-              <a:rPr lang="en-US" sz="1800" dirty="0">
-                <a:solidFill>
-                  <a:srgbClr val="6B6B70"/>
-                </a:solidFill>
-                <a:latin typeface="Courier New" pitchFamily="34" charset="0"/>
-                <a:ea typeface="Courier New" pitchFamily="34" charset="-122"/>
-                <a:cs typeface="Courier New" pitchFamily="34" charset="-120"/>
-              </a:rPr>
-              <a:t>снимок: расчёт</a:t>
-            </a:r>
-            <a:endParaRPr lang="en-US" sz="1800" dirty="0"/>
-          </a:p>
-        </p:txBody>
-      </p:sp>
-      <p:sp>
-        <p:nvSpPr>
-          <p:cNvPr id="15" name="Text 13"/>
-          <p:cNvSpPr/>
-          <p:nvPr/>
-        </p:nvSpPr>
-        <p:spPr>
-          <a:xfrm>
-            <a:off x="7620000" y="6440686"/>
-            <a:ext cx="3352800" cy="333375"/>
-          </a:xfrm>
-          <a:prstGeom prst="rect">
-            <a:avLst/>
-          </a:prstGeom>
-          <a:noFill/>
-          <a:ln/>
-        </p:spPr>
-        <p:txBody>
-          <a:bodyPr wrap="square" lIns="25400" tIns="25400" rIns="25400" bIns="25400" rtlCol="0" anchor="t">
-            <a:normAutofit/>
-          </a:bodyPr>
-          <a:lstStyle/>
-          <a:p>
-            <a:pPr algn="l" indent="0" marL="0">
-              <a:buNone/>
-            </a:pPr>
-            <a:r>
-              <a:rPr lang="en-US" sz="1950" b="1" dirty="0">
-                <a:solidFill>
-                  <a:srgbClr val="111111"/>
-                </a:solidFill>
-                <a:latin typeface="Arial" pitchFamily="34" charset="0"/>
-                <a:ea typeface="Arial" pitchFamily="34" charset="-122"/>
-                <a:cs typeface="Arial" pitchFamily="34" charset="-120"/>
-              </a:rPr>
-              <a:t>3. Расчёт</a:t>
-            </a:r>
-            <a:endParaRPr lang="en-US" sz="1950" dirty="0"/>
-          </a:p>
-        </p:txBody>
-      </p:sp>
-      <p:sp>
-        <p:nvSpPr>
-          <p:cNvPr id="16" name="Text 14"/>
-          <p:cNvSpPr/>
-          <p:nvPr/>
-        </p:nvSpPr>
-        <p:spPr>
-          <a:xfrm>
-            <a:off x="7620000" y="6888361"/>
-            <a:ext cx="3139440" cy="929283"/>
-          </a:xfrm>
-          <a:prstGeom prst="rect">
-            <a:avLst/>
-          </a:prstGeom>
-          <a:noFill/>
-          <a:ln/>
-        </p:spPr>
-        <p:txBody>
-          <a:bodyPr wrap="square" lIns="25400" tIns="25400" rIns="25400" bIns="25400" rtlCol="0" anchor="t">
-            <a:normAutofit/>
-          </a:bodyPr>
-          <a:lstStyle/>
-          <a:p>
-            <a:pPr algn="l" indent="0" marL="0">
-              <a:lnSpc>
-                <a:spcPct val="111429"/>
-              </a:lnSpc>
-              <a:buNone/>
-            </a:pPr>
-            <a:r>
-              <a:rPr lang="en-US" sz="1800" dirty="0">
-                <a:solidFill>
-                  <a:srgbClr val="3A3A3E"/>
-                </a:solidFill>
-                <a:latin typeface="Arial" pitchFamily="34" charset="0"/>
-                <a:ea typeface="Arial" pitchFamily="34" charset="-122"/>
-                <a:cs typeface="Arial" pitchFamily="34" charset="-120"/>
-              </a:rPr>
-              <a:t>Перевозка и утилизация отдельно, у полигона статус и дата</a:t>
-            </a:r>
-            <a:endParaRPr lang="en-US" sz="1800" dirty="0"/>
-          </a:p>
-        </p:txBody>
-      </p:sp>
-      <p:sp>
-        <p:nvSpPr>
-          <p:cNvPr id="17" name="Shape 15"/>
-          <p:cNvSpPr/>
-          <p:nvPr/>
-        </p:nvSpPr>
-        <p:spPr>
-          <a:xfrm>
-            <a:off x="10896600" y="2287786"/>
-            <a:ext cx="3048000" cy="4000500"/>
           </a:xfrm>
           <a:prstGeom prst="roundRect">
             <a:avLst>
               <a:gd name="adj" fmla="val 6250"/>
             </a:avLst>
           </a:prstGeom>
-          <a:solidFill>
-            <a:srgbClr val="EDECF0"/>
-          </a:solidFill>
-          <a:ln/>
-        </p:spPr>
-      </p:sp>
-      <p:sp>
-        <p:nvSpPr>
-          <p:cNvPr id="18" name="Text 16"/>
-          <p:cNvSpPr/>
-          <p:nvPr/>
-        </p:nvSpPr>
-        <p:spPr>
-          <a:xfrm>
-            <a:off x="11003280" y="2440186"/>
-            <a:ext cx="2834640" cy="3733800"/>
-          </a:xfrm>
-          <a:prstGeom prst="rect">
-            <a:avLst/>
-          </a:prstGeom>
-          <a:noFill/>
-          <a:ln/>
-        </p:spPr>
-        <p:txBody>
-          <a:bodyPr wrap="square" lIns="25400" tIns="25400" rIns="25400" bIns="25400" rtlCol="0" anchor="ctr">
-            <a:normAutofit/>
-          </a:bodyPr>
-          <a:lstStyle/>
-          <a:p>
-            <a:pPr algn="ctr" indent="0" marL="0">
-              <a:buNone/>
-            </a:pPr>
-            <a:r>
-              <a:rPr lang="en-US" sz="1800" dirty="0">
-                <a:solidFill>
-                  <a:srgbClr val="6B6B70"/>
-                </a:solidFill>
-                <a:latin typeface="Courier New" pitchFamily="34" charset="0"/>
-                <a:ea typeface="Courier New" pitchFamily="34" charset="-122"/>
-                <a:cs typeface="Courier New" pitchFamily="34" charset="-120"/>
-              </a:rPr>
-              <a:t>снимок: сравнение</a:t>
-            </a:r>
-            <a:endParaRPr lang="en-US" sz="1800" dirty="0"/>
-          </a:p>
-        </p:txBody>
-      </p:sp>
-      <p:sp>
-        <p:nvSpPr>
-          <p:cNvPr id="19" name="Text 17"/>
-          <p:cNvSpPr/>
-          <p:nvPr/>
-        </p:nvSpPr>
-        <p:spPr>
-          <a:xfrm>
-            <a:off x="10896600" y="6440686"/>
+        </p:spPr>
+      </p:pic>
+      <p:sp>
+        <p:nvSpPr>
+          <p:cNvPr id="11" name="Text 9"/>
+          <p:cNvSpPr/>
+          <p:nvPr/>
+        </p:nvSpPr>
+        <p:spPr>
+          <a:xfrm>
+            <a:off x="4343400" y="6440686"/>
             <a:ext cx="3352800" cy="333375"/>
           </a:xfrm>
           <a:prstGeom prst="rect">
@@ -11010,7 +10684,7 @@
                 <a:ea typeface="Arial" pitchFamily="34" charset="-122"/>
                 <a:cs typeface="Arial" pitchFamily="34" charset="-120"/>
               </a:rPr>
-              <a:t>4. Сравнение</a:t>
+              <a:t>2. Отходы и объём</a:t>
             </a:r>
             <a:endParaRPr lang="en-US" sz="1950" dirty="0"/>
           </a:p>
@@ -11018,14 +10692,14 @@
       </p:sp>
       <p:sp>
         <p:nvSpPr>
-          <p:cNvPr id="20" name="Text 18"/>
-          <p:cNvSpPr/>
-          <p:nvPr/>
-        </p:nvSpPr>
-        <p:spPr>
-          <a:xfrm>
-            <a:off x="10896600" y="6888361"/>
-            <a:ext cx="3139440" cy="1226344"/>
+          <p:cNvPr id="12" name="Text 10"/>
+          <p:cNvSpPr/>
+          <p:nvPr/>
+        </p:nvSpPr>
+        <p:spPr>
+          <a:xfrm>
+            <a:off x="4343400" y="6888361"/>
+            <a:ext cx="3139440" cy="929283"/>
           </a:xfrm>
           <a:prstGeom prst="rect">
             <a:avLst/>
@@ -11054,7 +10728,7 @@
                 <a:ea typeface="Arial" pitchFamily="34" charset="-122"/>
                 <a:cs typeface="Arial" pitchFamily="34" charset="-120"/>
               </a:rPr>
-              <a:t>Сортировка, предел расстояния, объём делится между полигонами</a:t>
+              <a:t>В тоннах или кубометрах, в тонны переводит сервер</a:t>
             </a:r>
             <a:endParaRPr lang="en-US" sz="1800" dirty="0"/>
           </a:p>
@@ -11062,13 +10736,13 @@
       </p:sp>
       <p:sp>
         <p:nvSpPr>
-          <p:cNvPr id="21" name="Shape 19"/>
-          <p:cNvSpPr/>
-          <p:nvPr/>
-        </p:nvSpPr>
-        <p:spPr>
-          <a:xfrm>
-            <a:off x="14173200" y="2287786"/>
+          <p:cNvPr id="13" name="Shape 11"/>
+          <p:cNvSpPr/>
+          <p:nvPr/>
+        </p:nvSpPr>
+        <p:spPr>
+          <a:xfrm>
+            <a:off x="7620000" y="2287786"/>
             <a:ext cx="3048000" cy="4000500"/>
           </a:xfrm>
           <a:prstGeom prst="roundRect">
@@ -11082,47 +10756,298 @@
           <a:ln/>
         </p:spPr>
       </p:sp>
-      <p:sp>
-        <p:nvSpPr>
-          <p:cNvPr id="22" name="Text 20"/>
-          <p:cNvSpPr/>
-          <p:nvPr/>
-        </p:nvSpPr>
+      <p:pic>
+        <p:nvPicPr>
+          <p:cNvPr id="30" name="Снимок 3" descr="Снимок шага 3: расчёт по полигонам"/>
+          <p:cNvPicPr>
+            <a:picLocks noChangeAspect="1"/>
+          </p:cNvPicPr>
+          <p:nvPr/>
+        </p:nvPicPr>
+        <p:blipFill>
+          <a:blip r:embed="rId5"/>
+          <a:stretch>
+            <a:fillRect/>
+          </a:stretch>
+        </p:blipFill>
+        <p:spPr>
+          <a:xfrm>
+            <a:off x="7726680" y="2440186"/>
+            <a:ext cx="2834640" cy="3733800"/>
+          </a:xfrm>
+          <a:prstGeom prst="roundRect">
+            <a:avLst>
+              <a:gd name="adj" fmla="val 6250"/>
+            </a:avLst>
+          </a:prstGeom>
+        </p:spPr>
+      </p:pic>
+      <p:sp>
+        <p:nvSpPr>
+          <p:cNvPr id="15" name="Text 13"/>
+          <p:cNvSpPr/>
+          <p:nvPr/>
+        </p:nvSpPr>
+        <p:spPr>
+          <a:xfrm>
+            <a:off x="7620000" y="6440686"/>
+            <a:ext cx="3352800" cy="333375"/>
+          </a:xfrm>
+          <a:prstGeom prst="rect">
+            <a:avLst/>
+          </a:prstGeom>
+          <a:noFill/>
+          <a:ln/>
+        </p:spPr>
+        <p:txBody>
+          <a:bodyPr wrap="square" lIns="25400" tIns="25400" rIns="25400" bIns="25400" rtlCol="0" anchor="t">
+            <a:normAutofit/>
+          </a:bodyPr>
+          <a:lstStyle/>
+          <a:p>
+            <a:pPr algn="l" indent="0" marL="0">
+              <a:buNone/>
+            </a:pPr>
+            <a:r>
+              <a:rPr lang="en-US" sz="1950" b="1" dirty="0">
+                <a:solidFill>
+                  <a:srgbClr val="111111"/>
+                </a:solidFill>
+                <a:latin typeface="Arial" pitchFamily="34" charset="0"/>
+                <a:ea typeface="Arial" pitchFamily="34" charset="-122"/>
+                <a:cs typeface="Arial" pitchFamily="34" charset="-120"/>
+              </a:rPr>
+              <a:t>3. Расчёт</a:t>
+            </a:r>
+            <a:endParaRPr lang="en-US" sz="1950" dirty="0"/>
+          </a:p>
+        </p:txBody>
+      </p:sp>
+      <p:sp>
+        <p:nvSpPr>
+          <p:cNvPr id="16" name="Text 14"/>
+          <p:cNvSpPr/>
+          <p:nvPr/>
+        </p:nvSpPr>
+        <p:spPr>
+          <a:xfrm>
+            <a:off x="7620000" y="6888361"/>
+            <a:ext cx="3139440" cy="929283"/>
+          </a:xfrm>
+          <a:prstGeom prst="rect">
+            <a:avLst/>
+          </a:prstGeom>
+          <a:noFill/>
+          <a:ln/>
+        </p:spPr>
+        <p:txBody>
+          <a:bodyPr wrap="square" lIns="25400" tIns="25400" rIns="25400" bIns="25400" rtlCol="0" anchor="t">
+            <a:normAutofit/>
+          </a:bodyPr>
+          <a:lstStyle/>
+          <a:p>
+            <a:pPr algn="l" indent="0" marL="0">
+              <a:lnSpc>
+                <a:spcPct val="111429"/>
+              </a:lnSpc>
+              <a:buNone/>
+            </a:pPr>
+            <a:r>
+              <a:rPr lang="en-US" sz="1800" dirty="0">
+                <a:solidFill>
+                  <a:srgbClr val="3A3A3E"/>
+                </a:solidFill>
+                <a:latin typeface="Arial" pitchFamily="34" charset="0"/>
+                <a:ea typeface="Arial" pitchFamily="34" charset="-122"/>
+                <a:cs typeface="Arial" pitchFamily="34" charset="-120"/>
+              </a:rPr>
+              <a:t>Перевозка и утилизация отдельно, у полигона статус и дата</a:t>
+            </a:r>
+            <a:endParaRPr lang="en-US" sz="1800" dirty="0"/>
+          </a:p>
+        </p:txBody>
+      </p:sp>
+      <p:sp>
+        <p:nvSpPr>
+          <p:cNvPr id="17" name="Shape 15"/>
+          <p:cNvSpPr/>
+          <p:nvPr/>
+        </p:nvSpPr>
+        <p:spPr>
+          <a:xfrm>
+            <a:off x="10896600" y="2287786"/>
+            <a:ext cx="3048000" cy="4000500"/>
+          </a:xfrm>
+          <a:prstGeom prst="roundRect">
+            <a:avLst>
+              <a:gd name="adj" fmla="val 6250"/>
+            </a:avLst>
+          </a:prstGeom>
+          <a:solidFill>
+            <a:srgbClr val="EDECF0"/>
+          </a:solidFill>
+          <a:ln/>
+        </p:spPr>
+      </p:sp>
+      <p:pic>
+        <p:nvPicPr>
+          <p:cNvPr id="31" name="Снимок 4" descr="Снимок шага 4: сортировка и предел расстояния"/>
+          <p:cNvPicPr>
+            <a:picLocks noChangeAspect="1"/>
+          </p:cNvPicPr>
+          <p:nvPr/>
+        </p:nvPicPr>
+        <p:blipFill>
+          <a:blip r:embed="rId6"/>
+          <a:stretch>
+            <a:fillRect/>
+          </a:stretch>
+        </p:blipFill>
+        <p:spPr>
+          <a:xfrm>
+            <a:off x="11003280" y="2440186"/>
+            <a:ext cx="2834640" cy="3733800"/>
+          </a:xfrm>
+          <a:prstGeom prst="roundRect">
+            <a:avLst>
+              <a:gd name="adj" fmla="val 6250"/>
+            </a:avLst>
+          </a:prstGeom>
+        </p:spPr>
+      </p:pic>
+      <p:sp>
+        <p:nvSpPr>
+          <p:cNvPr id="19" name="Text 17"/>
+          <p:cNvSpPr/>
+          <p:nvPr/>
+        </p:nvSpPr>
+        <p:spPr>
+          <a:xfrm>
+            <a:off x="10896600" y="6440686"/>
+            <a:ext cx="3352800" cy="333375"/>
+          </a:xfrm>
+          <a:prstGeom prst="rect">
+            <a:avLst/>
+          </a:prstGeom>
+          <a:noFill/>
+          <a:ln/>
+        </p:spPr>
+        <p:txBody>
+          <a:bodyPr wrap="square" lIns="25400" tIns="25400" rIns="25400" bIns="25400" rtlCol="0" anchor="t">
+            <a:normAutofit/>
+          </a:bodyPr>
+          <a:lstStyle/>
+          <a:p>
+            <a:pPr algn="l" indent="0" marL="0">
+              <a:buNone/>
+            </a:pPr>
+            <a:r>
+              <a:rPr lang="en-US" sz="1950" b="1" dirty="0">
+                <a:solidFill>
+                  <a:srgbClr val="111111"/>
+                </a:solidFill>
+                <a:latin typeface="Arial" pitchFamily="34" charset="0"/>
+                <a:ea typeface="Arial" pitchFamily="34" charset="-122"/>
+                <a:cs typeface="Arial" pitchFamily="34" charset="-120"/>
+              </a:rPr>
+              <a:t>4. Сравнение</a:t>
+            </a:r>
+            <a:endParaRPr lang="en-US" sz="1950" dirty="0"/>
+          </a:p>
+        </p:txBody>
+      </p:sp>
+      <p:sp>
+        <p:nvSpPr>
+          <p:cNvPr id="20" name="Text 18"/>
+          <p:cNvSpPr/>
+          <p:nvPr/>
+        </p:nvSpPr>
+        <p:spPr>
+          <a:xfrm>
+            <a:off x="10896600" y="6888361"/>
+            <a:ext cx="3139440" cy="1226344"/>
+          </a:xfrm>
+          <a:prstGeom prst="rect">
+            <a:avLst/>
+          </a:prstGeom>
+          <a:noFill/>
+          <a:ln/>
+        </p:spPr>
+        <p:txBody>
+          <a:bodyPr wrap="square" lIns="25400" tIns="25400" rIns="25400" bIns="25400" rtlCol="0" anchor="t">
+            <a:normAutofit/>
+          </a:bodyPr>
+          <a:lstStyle/>
+          <a:p>
+            <a:pPr algn="l" indent="0" marL="0">
+              <a:lnSpc>
+                <a:spcPct val="111429"/>
+              </a:lnSpc>
+              <a:buNone/>
+            </a:pPr>
+            <a:r>
+              <a:rPr lang="en-US" sz="1800" dirty="0">
+                <a:solidFill>
+                  <a:srgbClr val="3A3A3E"/>
+                </a:solidFill>
+                <a:latin typeface="Arial" pitchFamily="34" charset="0"/>
+                <a:ea typeface="Arial" pitchFamily="34" charset="-122"/>
+                <a:cs typeface="Arial" pitchFamily="34" charset="-120"/>
+              </a:rPr>
+              <a:t>Сортировка, предел расстояния, объём делится между полигонами</a:t>
+            </a:r>
+            <a:endParaRPr lang="en-US" sz="1800" dirty="0"/>
+          </a:p>
+        </p:txBody>
+      </p:sp>
+      <p:sp>
+        <p:nvSpPr>
+          <p:cNvPr id="21" name="Shape 19"/>
+          <p:cNvSpPr/>
+          <p:nvPr/>
+        </p:nvSpPr>
+        <p:spPr>
+          <a:xfrm>
+            <a:off x="14173200" y="2287786"/>
+            <a:ext cx="3048000" cy="4000500"/>
+          </a:xfrm>
+          <a:prstGeom prst="roundRect">
+            <a:avLst>
+              <a:gd name="adj" fmla="val 6250"/>
+            </a:avLst>
+          </a:prstGeom>
+          <a:solidFill>
+            <a:srgbClr val="EDECF0"/>
+          </a:solidFill>
+          <a:ln/>
+        </p:spPr>
+      </p:sp>
+      <p:pic>
+        <p:nvPicPr>
+          <p:cNvPr id="32" name="Снимок 5" descr="Снимок шага 5: коммерческое предложение"/>
+          <p:cNvPicPr>
+            <a:picLocks noChangeAspect="1"/>
+          </p:cNvPicPr>
+          <p:nvPr/>
+        </p:nvPicPr>
+        <p:blipFill>
+          <a:blip r:embed="rId7"/>
+          <a:stretch>
+            <a:fillRect/>
+          </a:stretch>
+        </p:blipFill>
         <p:spPr>
           <a:xfrm>
             <a:off x="14279880" y="2440186"/>
             <a:ext cx="2834640" cy="3733800"/>
           </a:xfrm>
-          <a:prstGeom prst="rect">
-            <a:avLst/>
-          </a:prstGeom>
-          <a:noFill/>
-          <a:ln/>
-        </p:spPr>
-        <p:txBody>
-          <a:bodyPr wrap="square" lIns="25400" tIns="25400" rIns="25400" bIns="25400" rtlCol="0" anchor="ctr">
-            <a:normAutofit/>
-          </a:bodyPr>
-          <a:lstStyle/>
-          <a:p>
-            <a:pPr algn="ctr" indent="0" marL="0">
-              <a:buNone/>
-            </a:pPr>
-            <a:r>
-              <a:rPr lang="en-US" sz="1800" dirty="0">
-                <a:solidFill>
-                  <a:srgbClr val="6B6B70"/>
-                </a:solidFill>
-                <a:latin typeface="Courier New" pitchFamily="34" charset="0"/>
-                <a:ea typeface="Courier New" pitchFamily="34" charset="-122"/>
-                <a:cs typeface="Courier New" pitchFamily="34" charset="-120"/>
-              </a:rPr>
-              <a:t>снимок: предложение</a:t>
-            </a:r>
-            <a:endParaRPr lang="en-US" sz="1800" dirty="0"/>
-          </a:p>
-        </p:txBody>
-      </p:sp>
+          <a:prstGeom prst="roundRect">
+            <a:avLst>
+              <a:gd name="adj" fmla="val 6250"/>
+            </a:avLst>
+          </a:prstGeom>
+        </p:spPr>
+      </p:pic>
       <p:sp>
         <p:nvSpPr>
           <p:cNvPr id="23" name="Text 21"/>

--- a/client/ПРЕЗЕНТАЦИЯ_ОНЛАЙН_ЭТАПА.pptx
+++ b/client/ПРЕЗЕНТАЦИЯ_ОНЛАЙН_ЭТАПА.pptx
@@ -1903,22 +1903,22 @@
         </p:nvSpPr>
         <p:spPr>
           <a:xfrm>
-            <a:off x="16833354" y="685800"/>
-            <a:ext cx="464046" cy="314325"/>
-          </a:xfrm>
-          <a:prstGeom prst="rect">
-            <a:avLst/>
-          </a:prstGeom>
-          <a:noFill/>
-          <a:ln/>
-        </p:spPr>
-        <p:txBody>
-          <a:bodyPr wrap="square" lIns="25400" tIns="25400" rIns="25400" bIns="25400" rtlCol="0" anchor="t">
-            <a:normAutofit/>
-          </a:bodyPr>
-          <a:lstStyle/>
-          <a:p>
-            <a:pPr algn="l" indent="0" marL="0">
+            <a:off x="16200120" y="685800"/>
+            <a:ext cx="1097280" cy="314325"/>
+          </a:xfrm>
+          <a:prstGeom prst="rect">
+            <a:avLst/>
+          </a:prstGeom>
+          <a:noFill/>
+          <a:ln/>
+        </p:spPr>
+        <p:txBody>
+          <a:bodyPr wrap="square" lIns="25400" tIns="25400" rIns="25400" bIns="25400" rtlCol="0" anchor="t">
+            <a:normAutofit/>
+          </a:bodyPr>
+          <a:lstStyle/>
+          <a:p>
+            <a:pPr algn="r" indent="0" marL="0">
               <a:buNone/>
             </a:pPr>
             <a:r>
@@ -3350,22 +3350,22 @@
         </p:nvSpPr>
         <p:spPr>
           <a:xfrm>
-            <a:off x="16685568" y="685800"/>
-            <a:ext cx="611832" cy="314325"/>
-          </a:xfrm>
-          <a:prstGeom prst="rect">
-            <a:avLst/>
-          </a:prstGeom>
-          <a:noFill/>
-          <a:ln/>
-        </p:spPr>
-        <p:txBody>
-          <a:bodyPr wrap="square" lIns="25400" tIns="25400" rIns="25400" bIns="25400" rtlCol="0" anchor="t">
-            <a:normAutofit/>
-          </a:bodyPr>
-          <a:lstStyle/>
-          <a:p>
-            <a:pPr algn="l" indent="0" marL="0">
+            <a:off x="16200120" y="685800"/>
+            <a:ext cx="1097280" cy="314325"/>
+          </a:xfrm>
+          <a:prstGeom prst="rect">
+            <a:avLst/>
+          </a:prstGeom>
+          <a:noFill/>
+          <a:ln/>
+        </p:spPr>
+        <p:txBody>
+          <a:bodyPr wrap="square" lIns="25400" tIns="25400" rIns="25400" bIns="25400" rtlCol="0" anchor="t">
+            <a:normAutofit/>
+          </a:bodyPr>
+          <a:lstStyle/>
+          <a:p>
+            <a:pPr algn="r" indent="0" marL="0">
               <a:buNone/>
             </a:pPr>
             <a:r>
@@ -4356,22 +4356,22 @@
         </p:nvSpPr>
         <p:spPr>
           <a:xfrm>
-            <a:off x="16748820" y="685800"/>
-            <a:ext cx="548580" cy="314325"/>
-          </a:xfrm>
-          <a:prstGeom prst="rect">
-            <a:avLst/>
-          </a:prstGeom>
-          <a:noFill/>
-          <a:ln/>
-        </p:spPr>
-        <p:txBody>
-          <a:bodyPr wrap="square" lIns="25400" tIns="25400" rIns="25400" bIns="25400" rtlCol="0" anchor="t">
-            <a:normAutofit/>
-          </a:bodyPr>
-          <a:lstStyle/>
-          <a:p>
-            <a:pPr algn="l" indent="0" marL="0">
+            <a:off x="16200120" y="685800"/>
+            <a:ext cx="1097280" cy="314325"/>
+          </a:xfrm>
+          <a:prstGeom prst="rect">
+            <a:avLst/>
+          </a:prstGeom>
+          <a:noFill/>
+          <a:ln/>
+        </p:spPr>
+        <p:txBody>
+          <a:bodyPr wrap="square" lIns="25400" tIns="25400" rIns="25400" bIns="25400" rtlCol="0" anchor="t">
+            <a:normAutofit/>
+          </a:bodyPr>
+          <a:lstStyle/>
+          <a:p>
+            <a:pPr algn="r" indent="0" marL="0">
               <a:buNone/>
             </a:pPr>
             <a:r>
@@ -5316,22 +5316,22 @@
         </p:nvSpPr>
         <p:spPr>
           <a:xfrm>
-            <a:off x="16699855" y="685800"/>
-            <a:ext cx="597545" cy="314325"/>
-          </a:xfrm>
-          <a:prstGeom prst="rect">
-            <a:avLst/>
-          </a:prstGeom>
-          <a:noFill/>
-          <a:ln/>
-        </p:spPr>
-        <p:txBody>
-          <a:bodyPr wrap="square" lIns="25400" tIns="25400" rIns="25400" bIns="25400" rtlCol="0" anchor="t">
-            <a:normAutofit/>
-          </a:bodyPr>
-          <a:lstStyle/>
-          <a:p>
-            <a:pPr algn="l" indent="0" marL="0">
+            <a:off x="16200120" y="685800"/>
+            <a:ext cx="1097280" cy="314325"/>
+          </a:xfrm>
+          <a:prstGeom prst="rect">
+            <a:avLst/>
+          </a:prstGeom>
+          <a:noFill/>
+          <a:ln/>
+        </p:spPr>
+        <p:txBody>
+          <a:bodyPr wrap="square" lIns="25400" tIns="25400" rIns="25400" bIns="25400" rtlCol="0" anchor="t">
+            <a:normAutofit/>
+          </a:bodyPr>
+          <a:lstStyle/>
+          <a:p>
+            <a:pPr algn="r" indent="0" marL="0">
               <a:buNone/>
             </a:pPr>
             <a:r>
@@ -6386,22 +6386,22 @@
         </p:nvSpPr>
         <p:spPr>
           <a:xfrm>
-            <a:off x="16784538" y="685800"/>
-            <a:ext cx="512862" cy="314325"/>
-          </a:xfrm>
-          <a:prstGeom prst="rect">
-            <a:avLst/>
-          </a:prstGeom>
-          <a:noFill/>
-          <a:ln/>
-        </p:spPr>
-        <p:txBody>
-          <a:bodyPr wrap="square" lIns="25400" tIns="25400" rIns="25400" bIns="25400" rtlCol="0" anchor="t">
-            <a:normAutofit/>
-          </a:bodyPr>
-          <a:lstStyle/>
-          <a:p>
-            <a:pPr algn="l" indent="0" marL="0">
+            <a:off x="16200120" y="685800"/>
+            <a:ext cx="1097280" cy="314325"/>
+          </a:xfrm>
+          <a:prstGeom prst="rect">
+            <a:avLst/>
+          </a:prstGeom>
+          <a:noFill/>
+          <a:ln/>
+        </p:spPr>
+        <p:txBody>
+          <a:bodyPr wrap="square" lIns="25400" tIns="25400" rIns="25400" bIns="25400" rtlCol="0" anchor="t">
+            <a:normAutofit/>
+          </a:bodyPr>
+          <a:lstStyle/>
+          <a:p>
+            <a:pPr algn="r" indent="0" marL="0">
               <a:buNone/>
             </a:pPr>
             <a:r>
@@ -7169,22 +7169,22 @@
         </p:nvSpPr>
         <p:spPr>
           <a:xfrm>
-            <a:off x="16787217" y="685800"/>
-            <a:ext cx="510183" cy="314325"/>
-          </a:xfrm>
-          <a:prstGeom prst="rect">
-            <a:avLst/>
-          </a:prstGeom>
-          <a:noFill/>
-          <a:ln/>
-        </p:spPr>
-        <p:txBody>
-          <a:bodyPr wrap="square" lIns="25400" tIns="25400" rIns="25400" bIns="25400" rtlCol="0" anchor="t">
-            <a:normAutofit/>
-          </a:bodyPr>
-          <a:lstStyle/>
-          <a:p>
-            <a:pPr algn="l" indent="0" marL="0">
+            <a:off x="16200120" y="685800"/>
+            <a:ext cx="1097280" cy="314325"/>
+          </a:xfrm>
+          <a:prstGeom prst="rect">
+            <a:avLst/>
+          </a:prstGeom>
+          <a:noFill/>
+          <a:ln/>
+        </p:spPr>
+        <p:txBody>
+          <a:bodyPr wrap="square" lIns="25400" tIns="25400" rIns="25400" bIns="25400" rtlCol="0" anchor="t">
+            <a:normAutofit/>
+          </a:bodyPr>
+          <a:lstStyle/>
+          <a:p>
+            <a:pPr algn="r" indent="0" marL="0">
               <a:buNone/>
             </a:pPr>
             <a:r>
@@ -8159,22 +8159,22 @@
         </p:nvSpPr>
         <p:spPr>
           <a:xfrm>
-            <a:off x="16758940" y="685800"/>
-            <a:ext cx="538460" cy="314325"/>
-          </a:xfrm>
-          <a:prstGeom prst="rect">
-            <a:avLst/>
-          </a:prstGeom>
-          <a:noFill/>
-          <a:ln/>
-        </p:spPr>
-        <p:txBody>
-          <a:bodyPr wrap="square" lIns="25400" tIns="25400" rIns="25400" bIns="25400" rtlCol="0" anchor="t">
-            <a:normAutofit/>
-          </a:bodyPr>
-          <a:lstStyle/>
-          <a:p>
-            <a:pPr algn="l" indent="0" marL="0">
+            <a:off x="16200120" y="685800"/>
+            <a:ext cx="1097280" cy="314325"/>
+          </a:xfrm>
+          <a:prstGeom prst="rect">
+            <a:avLst/>
+          </a:prstGeom>
+          <a:noFill/>
+          <a:ln/>
+        </p:spPr>
+        <p:txBody>
+          <a:bodyPr wrap="square" lIns="25400" tIns="25400" rIns="25400" bIns="25400" rtlCol="0" anchor="t">
+            <a:normAutofit/>
+          </a:bodyPr>
+          <a:lstStyle/>
+          <a:p>
+            <a:pPr algn="r" indent="0" marL="0">
               <a:buNone/>
             </a:pPr>
             <a:r>
@@ -8932,22 +8932,22 @@
         </p:nvSpPr>
         <p:spPr>
           <a:xfrm>
-            <a:off x="16786771" y="685800"/>
-            <a:ext cx="510629" cy="314325"/>
-          </a:xfrm>
-          <a:prstGeom prst="rect">
-            <a:avLst/>
-          </a:prstGeom>
-          <a:noFill/>
-          <a:ln/>
-        </p:spPr>
-        <p:txBody>
-          <a:bodyPr wrap="square" lIns="25400" tIns="25400" rIns="25400" bIns="25400" rtlCol="0" anchor="t">
-            <a:normAutofit/>
-          </a:bodyPr>
-          <a:lstStyle/>
-          <a:p>
-            <a:pPr algn="l" indent="0" marL="0">
+            <a:off x="16200120" y="685800"/>
+            <a:ext cx="1097280" cy="314325"/>
+          </a:xfrm>
+          <a:prstGeom prst="rect">
+            <a:avLst/>
+          </a:prstGeom>
+          <a:noFill/>
+          <a:ln/>
+        </p:spPr>
+        <p:txBody>
+          <a:bodyPr wrap="square" lIns="25400" tIns="25400" rIns="25400" bIns="25400" rtlCol="0" anchor="t">
+            <a:normAutofit/>
+          </a:bodyPr>
+          <a:lstStyle/>
+          <a:p>
+            <a:pPr algn="r" indent="0" marL="0">
               <a:buNone/>
             </a:pPr>
             <a:r>
@@ -10391,22 +10391,22 @@
         </p:nvSpPr>
         <p:spPr>
           <a:xfrm>
-            <a:off x="16774716" y="685800"/>
-            <a:ext cx="522684" cy="314325"/>
-          </a:xfrm>
-          <a:prstGeom prst="rect">
-            <a:avLst/>
-          </a:prstGeom>
-          <a:noFill/>
-          <a:ln/>
-        </p:spPr>
-        <p:txBody>
-          <a:bodyPr wrap="square" lIns="25400" tIns="25400" rIns="25400" bIns="25400" rtlCol="0" anchor="t">
-            <a:normAutofit/>
-          </a:bodyPr>
-          <a:lstStyle/>
-          <a:p>
-            <a:pPr algn="l" indent="0" marL="0">
+            <a:off x="16200120" y="685800"/>
+            <a:ext cx="1097280" cy="314325"/>
+          </a:xfrm>
+          <a:prstGeom prst="rect">
+            <a:avLst/>
+          </a:prstGeom>
+          <a:noFill/>
+          <a:ln/>
+        </p:spPr>
+        <p:txBody>
+          <a:bodyPr wrap="square" lIns="25400" tIns="25400" rIns="25400" bIns="25400" rtlCol="0" anchor="t">
+            <a:normAutofit/>
+          </a:bodyPr>
+          <a:lstStyle/>
+          <a:p>
+            <a:pPr algn="r" indent="0" marL="0">
               <a:buNone/>
             </a:pPr>
             <a:r>
@@ -11316,22 +11316,22 @@
         </p:nvSpPr>
         <p:spPr>
           <a:xfrm>
-            <a:off x="16790789" y="685800"/>
-            <a:ext cx="506611" cy="314325"/>
-          </a:xfrm>
-          <a:prstGeom prst="rect">
-            <a:avLst/>
-          </a:prstGeom>
-          <a:noFill/>
-          <a:ln/>
-        </p:spPr>
-        <p:txBody>
-          <a:bodyPr wrap="square" lIns="25400" tIns="25400" rIns="25400" bIns="25400" rtlCol="0" anchor="t">
-            <a:normAutofit/>
-          </a:bodyPr>
-          <a:lstStyle/>
-          <a:p>
-            <a:pPr algn="l" indent="0" marL="0">
+            <a:off x="16200120" y="685800"/>
+            <a:ext cx="1097280" cy="314325"/>
+          </a:xfrm>
+          <a:prstGeom prst="rect">
+            <a:avLst/>
+          </a:prstGeom>
+          <a:noFill/>
+          <a:ln/>
+        </p:spPr>
+        <p:txBody>
+          <a:bodyPr wrap="square" lIns="25400" tIns="25400" rIns="25400" bIns="25400" rtlCol="0" anchor="t">
+            <a:normAutofit/>
+          </a:bodyPr>
+          <a:lstStyle/>
+          <a:p>
+            <a:pPr algn="r" indent="0" marL="0">
               <a:buNone/>
             </a:pPr>
             <a:r>
@@ -12628,22 +12628,22 @@
         </p:nvSpPr>
         <p:spPr>
           <a:xfrm>
-            <a:off x="16770846" y="685800"/>
-            <a:ext cx="526554" cy="314325"/>
-          </a:xfrm>
-          <a:prstGeom prst="rect">
-            <a:avLst/>
-          </a:prstGeom>
-          <a:noFill/>
-          <a:ln/>
-        </p:spPr>
-        <p:txBody>
-          <a:bodyPr wrap="square" lIns="25400" tIns="25400" rIns="25400" bIns="25400" rtlCol="0" anchor="t">
-            <a:normAutofit/>
-          </a:bodyPr>
-          <a:lstStyle/>
-          <a:p>
-            <a:pPr algn="l" indent="0" marL="0">
+            <a:off x="16200120" y="685800"/>
+            <a:ext cx="1097280" cy="314325"/>
+          </a:xfrm>
+          <a:prstGeom prst="rect">
+            <a:avLst/>
+          </a:prstGeom>
+          <a:noFill/>
+          <a:ln/>
+        </p:spPr>
+        <p:txBody>
+          <a:bodyPr wrap="square" lIns="25400" tIns="25400" rIns="25400" bIns="25400" rtlCol="0" anchor="t">
+            <a:normAutofit/>
+          </a:bodyPr>
+          <a:lstStyle/>
+          <a:p>
+            <a:pPr algn="r" indent="0" marL="0">
               <a:buNone/>
             </a:pPr>
             <a:r>
@@ -13850,22 +13850,22 @@
         </p:nvSpPr>
         <p:spPr>
           <a:xfrm>
-            <a:off x="16781562" y="685800"/>
-            <a:ext cx="515838" cy="314325"/>
-          </a:xfrm>
-          <a:prstGeom prst="rect">
-            <a:avLst/>
-          </a:prstGeom>
-          <a:noFill/>
-          <a:ln/>
-        </p:spPr>
-        <p:txBody>
-          <a:bodyPr wrap="square" lIns="25400" tIns="25400" rIns="25400" bIns="25400" rtlCol="0" anchor="t">
-            <a:normAutofit/>
-          </a:bodyPr>
-          <a:lstStyle/>
-          <a:p>
-            <a:pPr algn="l" indent="0" marL="0">
+            <a:off x="16200120" y="685800"/>
+            <a:ext cx="1097280" cy="314325"/>
+          </a:xfrm>
+          <a:prstGeom prst="rect">
+            <a:avLst/>
+          </a:prstGeom>
+          <a:noFill/>
+          <a:ln/>
+        </p:spPr>
+        <p:txBody>
+          <a:bodyPr wrap="square" lIns="25400" tIns="25400" rIns="25400" bIns="25400" rtlCol="0" anchor="t">
+            <a:normAutofit/>
+          </a:bodyPr>
+          <a:lstStyle/>
+          <a:p>
+            <a:pPr algn="r" indent="0" marL="0">
               <a:buNone/>
             </a:pPr>
             <a:r>

--- a/client/ПРЕЗЕНТАЦИЯ_ОНЛАЙН_ЭТАПА.pptx
+++ b/client/ПРЕЗЕНТАЦИЯ_ОНЛАЙН_ЭТАПА.pptx
@@ -6157,69 +6157,30 @@
           <a:ln/>
         </p:spPr>
       </p:sp>
-      <p:sp>
-        <p:nvSpPr>
-          <p:cNvPr id="26" name="Shape 23"/>
-          <p:cNvSpPr/>
-          <p:nvPr/>
-        </p:nvSpPr>
+      <p:pic>
+        <p:nvPicPr>
+          <p:cNvPr id="30" name="Image 1" descr="Код ссылки на видео прохождения сценария"/>
+          <p:cNvPicPr>
+            <a:picLocks noChangeAspect="1"/>
+          </p:cNvPicPr>
+          <p:nvPr/>
+        </p:nvPicPr>
+        <p:blipFill>
+          <a:blip r:embed="rId4"/>
+          <a:stretch>
+            <a:fillRect/>
+          </a:stretch>
+        </p:blipFill>
         <p:spPr>
           <a:xfrm>
             <a:off x="14649450" y="6368058"/>
             <a:ext cx="1905000" cy="1905000"/>
           </a:xfrm>
-          <a:prstGeom prst="roundRect">
-            <a:avLst>
-              <a:gd name="adj" fmla="val 3000"/>
-            </a:avLst>
-          </a:prstGeom>
-          <a:solidFill>
-            <a:srgbClr val="E4E3E8"/>
-          </a:solidFill>
-          <a:ln/>
-        </p:spPr>
-      </p:sp>
-      <p:sp>
-        <p:nvSpPr>
-          <p:cNvPr id="27" name="Text 24"/>
-          <p:cNvSpPr/>
-          <p:nvPr/>
-        </p:nvSpPr>
-        <p:spPr>
-          <a:xfrm>
-            <a:off x="14611350" y="6368058"/>
-            <a:ext cx="1981200" cy="1943100"/>
-          </a:xfrm>
-          <a:prstGeom prst="rect">
-            <a:avLst/>
-          </a:prstGeom>
-          <a:noFill/>
-          <a:ln/>
-        </p:spPr>
-        <p:txBody>
-          <a:bodyPr wrap="square" lIns="25400" tIns="25400" rIns="25400" bIns="25400" rtlCol="0" anchor="ctr">
-            <a:normAutofit/>
-          </a:bodyPr>
-          <a:lstStyle/>
-          <a:p>
-            <a:pPr algn="ctr" indent="0" marL="0">
-              <a:buNone/>
-            </a:pPr>
-            <a:r>
-              <a:rPr lang="en-US" sz="1800" dirty="0">
-                <a:solidFill>
-                  <a:srgbClr val="6B6B70"/>
-                </a:solidFill>
-                <a:latin typeface="Courier New" pitchFamily="34" charset="0"/>
-                <a:ea typeface="Courier New" pitchFamily="34" charset="-122"/>
-                <a:cs typeface="Courier New" pitchFamily="34" charset="-120"/>
-              </a:rPr>
-              <a:t>QR видео</a:t>
-            </a:r>
-            <a:endParaRPr lang="en-US" sz="1800" dirty="0"/>
-          </a:p>
-        </p:txBody>
-      </p:sp>
+          <a:prstGeom prst="rect">
+            <a:avLst/>
+          </a:prstGeom>
+        </p:spPr>
+      </p:pic>
       <p:sp>
         <p:nvSpPr>
           <p:cNvPr id="28" name="Text 25"/>

--- a/client/ПРЕЗЕНТАЦИЯ_ОНЛАЙН_ЭТАПА.pptx
+++ b/client/ПРЕЗЕНТАЦИЯ_ОНЛАЙН_ЭТАПА.pptx
@@ -3190,7 +3190,7 @@
         <p:spPr>
           <a:xfrm>
             <a:off x="13411200" y="7419380"/>
-            <a:ext cx="3924300" cy="632222"/>
+            <a:ext cx="4191000" cy="335161"/>
           </a:xfrm>
           <a:prstGeom prst="rect">
             <a:avLst/>
@@ -3233,7 +3233,7 @@
         </p:nvSpPr>
         <p:spPr>
           <a:xfrm>
-            <a:off x="13411200" y="8108752"/>
+            <a:off x="13411200" y="7811691"/>
             <a:ext cx="4191000" cy="335161"/>
           </a:xfrm>
           <a:prstGeom prst="rect">
@@ -6225,47 +6225,6 @@
           </a:p>
         </p:txBody>
       </p:sp>
-      <p:sp>
-        <p:nvSpPr>
-          <p:cNvPr id="29" name="Text 26"/>
-          <p:cNvSpPr/>
-          <p:nvPr/>
-        </p:nvSpPr>
-        <p:spPr>
-          <a:xfrm>
-            <a:off x="1066800" y="9401175"/>
-            <a:ext cx="17769840" cy="314325"/>
-          </a:xfrm>
-          <a:prstGeom prst="rect">
-            <a:avLst/>
-          </a:prstGeom>
-          <a:noFill/>
-          <a:ln/>
-        </p:spPr>
-        <p:txBody>
-          <a:bodyPr wrap="square" lIns="25400" tIns="25400" rIns="25400" bIns="25400" rtlCol="0" anchor="t">
-            <a:normAutofit/>
-          </a:bodyPr>
-          <a:lstStyle/>
-          <a:p>
-            <a:pPr algn="l" indent="0" marL="0">
-              <a:buNone/>
-            </a:pPr>
-            <a:r>
-              <a:rPr lang="en-US" sz="1800" dirty="0">
-                <a:solidFill>
-                  <a:srgbClr val="6B6B70"/>
-                </a:solidFill>
-                <a:latin typeface="Arial" pitchFamily="34" charset="0"/>
-                <a:ea typeface="Arial" pitchFamily="34" charset="-122"/>
-                <a:cs typeface="Arial" pitchFamily="34" charset="-120"/>
-              </a:rPr>
-              <a:t>Названия, координаты и адреса полигонов: © участники OpenStreetMap, лицензия ODbL 1.0</a:t>
-            </a:r>
-            <a:endParaRPr lang="en-US" sz="1800" dirty="0"/>
-          </a:p>
-        </p:txBody>
-      </p:sp>
     </p:spTree>
   </p:cSld>
   <p:clrMapOvr>
@@ -6812,7 +6771,7 @@
         <p:spPr>
           <a:xfrm>
             <a:off x="1066800" y="9096375"/>
-            <a:ext cx="2516401" cy="304800"/>
+            <a:ext cx="2946400" cy="304800"/>
           </a:xfrm>
           <a:prstGeom prst="rect">
             <a:avLst/>
@@ -6853,7 +6812,7 @@
         <p:spPr>
           <a:xfrm>
             <a:off x="1066800" y="9401175"/>
-            <a:ext cx="2516401" cy="314325"/>
+            <a:ext cx="2946400" cy="314325"/>
           </a:xfrm>
           <a:prstGeom prst="rect">
             <a:avLst/>
@@ -6893,8 +6852,8 @@
         </p:nvSpPr>
         <p:spPr>
           <a:xfrm>
-            <a:off x="3964037" y="9096375"/>
-            <a:ext cx="2793236" cy="304800"/>
+            <a:off x="4368800" y="9096375"/>
+            <a:ext cx="2946400" cy="304800"/>
           </a:xfrm>
           <a:prstGeom prst="rect">
             <a:avLst/>
@@ -6934,8 +6893,8 @@
         </p:nvSpPr>
         <p:spPr>
           <a:xfrm>
-            <a:off x="3964037" y="9401175"/>
-            <a:ext cx="2793236" cy="314325"/>
+            <a:off x="4368800" y="9401175"/>
+            <a:ext cx="2946400" cy="314325"/>
           </a:xfrm>
           <a:prstGeom prst="rect">
             <a:avLst/>
@@ -6975,8 +6934,8 @@
         </p:nvSpPr>
         <p:spPr>
           <a:xfrm>
-            <a:off x="7112943" y="9096375"/>
-            <a:ext cx="2242021" cy="304800"/>
+            <a:off x="7670800" y="9096375"/>
+            <a:ext cx="2946400" cy="304800"/>
           </a:xfrm>
           <a:prstGeom prst="rect">
             <a:avLst/>
@@ -7016,8 +6975,8 @@
         </p:nvSpPr>
         <p:spPr>
           <a:xfrm>
-            <a:off x="7112943" y="9401175"/>
-            <a:ext cx="2242021" cy="314325"/>
+            <a:off x="7670800" y="9401175"/>
+            <a:ext cx="2946400" cy="314325"/>
           </a:xfrm>
           <a:prstGeom prst="rect">
             <a:avLst/>
@@ -8755,7 +8714,7 @@
         <p:spPr>
           <a:xfrm>
             <a:off x="1066800" y="9178379"/>
-            <a:ext cx="9010948" cy="499021"/>
+            <a:ext cx="9728200" cy="499021"/>
           </a:xfrm>
           <a:prstGeom prst="roundRect">
             <a:avLst>
@@ -8777,7 +8736,7 @@
         <p:spPr>
           <a:xfrm>
             <a:off x="1219200" y="9254579"/>
-            <a:ext cx="8976476" cy="384721"/>
+            <a:ext cx="9423400" cy="384721"/>
           </a:xfrm>
           <a:prstGeom prst="rect">
             <a:avLst/>
@@ -10225,47 +10184,6 @@
                 <a:cs typeface="Arial" pitchFamily="34" charset="-120"/>
               </a:rPr>
               <a:t>Выбор полигона</a:t>
-            </a:r>
-            <a:endParaRPr lang="en-US" sz="1950" dirty="0"/>
-          </a:p>
-        </p:txBody>
-      </p:sp>
-      <p:sp>
-        <p:nvSpPr>
-          <p:cNvPr id="39" name="Text 37"/>
-          <p:cNvSpPr/>
-          <p:nvPr/>
-        </p:nvSpPr>
-        <p:spPr>
-          <a:xfrm>
-            <a:off x="1066800" y="9372600"/>
-            <a:ext cx="17769840" cy="342900"/>
-          </a:xfrm>
-          <a:prstGeom prst="rect">
-            <a:avLst/>
-          </a:prstGeom>
-          <a:noFill/>
-          <a:ln/>
-        </p:spPr>
-        <p:txBody>
-          <a:bodyPr wrap="square" lIns="25400" tIns="25400" rIns="25400" bIns="25400" rtlCol="0" anchor="t">
-            <a:normAutofit/>
-          </a:bodyPr>
-          <a:lstStyle/>
-          <a:p>
-            <a:pPr algn="l" indent="0" marL="0">
-              <a:buNone/>
-            </a:pPr>
-            <a:r>
-              <a:rPr lang="en-US" sz="1950" dirty="0">
-                <a:solidFill>
-                  <a:srgbClr val="6B6B70"/>
-                </a:solidFill>
-                <a:latin typeface="Arial" pitchFamily="34" charset="0"/>
-                <a:ea typeface="Arial" pitchFamily="34" charset="-122"/>
-                <a:cs typeface="Arial" pitchFamily="34" charset="-120"/>
-              </a:rPr>
-              <a:t>Решение о выборе полигона остаётся за человеком.</a:t>
             </a:r>
             <a:endParaRPr lang="en-US" sz="1950" dirty="0"/>
           </a:p>

--- a/client/ПРЕЗЕНТАЦИЯ_ОНЛАЙН_ЭТАПА.pptx
+++ b/client/ПРЕЗЕНТАЦИЯ_ОНЛАЙН_ЭТАПА.pptx
@@ -2784,13 +2784,13 @@
             <a:r>
               <a:rPr lang="en-US" sz="1800" dirty="0">
                 <a:solidFill>
-                  <a:srgbClr val="6B6B70"/>
+                  <a:srgbClr val="111111"/>
                 </a:solidFill>
                 <a:latin typeface="Courier New" pitchFamily="34" charset="0"/>
                 <a:ea typeface="Courier New" pitchFamily="34" charset="-122"/>
                 <a:cs typeface="Courier New" pitchFamily="34" charset="-120"/>
               </a:rPr>
-              <a:t>&lt;заполняется при сдаче&gt;</a:t>
+              <a:t>https://github.com/Calcifer-02/TheOdd1sOut, ветка main</a:t>
             </a:r>
             <a:endParaRPr lang="en-US" sz="1800" dirty="0"/>
           </a:p>
@@ -2906,13 +2906,13 @@
             <a:r>
               <a:rPr lang="en-US" sz="1800" dirty="0">
                 <a:solidFill>
-                  <a:srgbClr val="6B6B70"/>
+                  <a:srgbClr val="111111"/>
                 </a:solidFill>
                 <a:latin typeface="Courier New" pitchFamily="34" charset="0"/>
                 <a:ea typeface="Courier New" pitchFamily="34" charset="-122"/>
                 <a:cs typeface="Courier New" pitchFamily="34" charset="-120"/>
               </a:rPr>
-              <a:t>&lt;заполняется при сдаче&gt;</a:t>
+              <a:t>Не требуются: вход из переписки. Право правки — по запросу</a:t>
             </a:r>
             <a:endParaRPr lang="en-US" sz="1800" dirty="0"/>
           </a:p>
